--- a/보장분석지_송슬기.pptx
+++ b/보장분석지_송슬기.pptx
@@ -3690,7 +3690,7 @@
                 <a:latin typeface="HY엽서M" panose="02030600000101010101" pitchFamily="18" charset="-127"/>
                 <a:ea typeface="HY엽서M" panose="02030600000101010101" pitchFamily="18" charset="-127"/>
               </a:rPr>
-              <a:t>2026년 07월 02일 기준</a:t>
+              <a:t>2026년 07월 03일 기준</a:t>
             </a:r>
           </a:p>
         </p:txBody>
@@ -6834,7 +6834,7 @@
                 <a:latin typeface="HY엽서M" panose="02030600000101010101" pitchFamily="18" charset="-127"/>
                 <a:ea typeface="HY엽서M" panose="02030600000101010101" pitchFamily="18" charset="-127"/>
               </a:rPr>
-              <a:t>: 38,000</a:t>
+              <a:t>: 20,000</a:t>
             </a:r>
           </a:p>
           <a:p>
@@ -6860,7 +6860,7 @@
                 <a:latin typeface="HY엽서M" panose="02030600000101010101" pitchFamily="18" charset="-127"/>
                 <a:ea typeface="HY엽서M" panose="02030600000101010101" pitchFamily="18" charset="-127"/>
               </a:rPr>
-              <a:t>: 7,100</a:t>
+              <a:t>: 3,900</a:t>
             </a:r>
           </a:p>
           <a:p>
@@ -6918,7 +6918,7 @@
                 <a:latin typeface="HY엽서M" panose="02030600000101010101" pitchFamily="18" charset="-127"/>
                 <a:ea typeface="HY엽서M" panose="02030600000101010101" pitchFamily="18" charset="-127"/>
               </a:rPr>
-              <a:t>: 700 / </a:t>
+              <a:t>: 500 / </a:t>
             </a:r>
             <a:r>
               <a:rPr lang="ko-KR" altLang="en-US" sz="969" dirty="0" err="1">
